--- a/dist/초3/사회·역사/과거와현재/초3_사회·역사_과거와현재_01_생활도구의변화_학생용.pptx
+++ b/dist/초3/사회·역사/과거와현재/초3_사회·역사_과거와현재_01_생활도구의변화_학생용.pptx
@@ -119,13 +119,13 @@
   <p:extLst>
     <p:ext uri="{521415D9-36F7-43E2-AB2F-B90AF26B5E84}">
       <p14:sectionLst xmlns:p14="http://schemas.microsoft.com/office/powerpoint/2010/main">
-        <p14:section name="도입" id="{87366bfc-99ff-084f-8cca-d1f4623598a6}">
+        <p14:section name="도입" id="{ffcc0582-4af3-d376-c014-cce32c1c8844}">
           <p14:sldIdLst>
             <p14:sldId id="256"/>
             <p14:sldId id="257"/>
           </p14:sldIdLst>
         </p14:section>
-        <p14:section name="개념" id="{fdd3e7e9-f0e3-39d8-8d77-bdeefe6fc7ff}">
+        <p14:section name="개념" id="{8114e7c7-cd56-cf77-7a4c-e320baada09a}">
           <p14:sldIdLst>
             <p14:sldId id="258"/>
             <p14:sldId id="259"/>
@@ -133,31 +133,31 @@
             <p14:sldId id="262"/>
           </p14:sldIdLst>
         </p14:section>
-        <p14:section name="연습" id="{31b42c49-0e99-ebaa-fffb-7caae4cff31e}">
+        <p14:section name="연습" id="{9c9f58bf-31ba-1fee-c532-64c4cbdc3579}">
           <p14:sldIdLst>
             <p14:sldId id="261"/>
             <p14:sldId id="263"/>
             <p14:sldId id="264"/>
           </p14:sldIdLst>
         </p14:section>
-        <p14:section name="개념" id="{d57b27b0-ac64-c980-975a-602acf60e90e}">
+        <p14:section name="개념" id="{1a0b93dc-3419-3011-ba96-ed790129a62c}">
           <p14:sldIdLst/>
         </p14:section>
-        <p14:section name="연습" id="{612bb32b-52b1-f388-4da8-4ef99d0a8879}">
+        <p14:section name="연습" id="{dc4fa436-0bf2-8526-e869-0b802455978d}">
           <p14:sldIdLst/>
         </p14:section>
-        <p14:section name="확인" id="{4421084d-5909-4711-1a9b-fc8211a6cf87}">
+        <p14:section name="확인" id="{a681b449-49e3-6747-9d45-aab145d999b6}">
           <p14:sldIdLst>
             <p14:sldId id="265"/>
             <p14:sldId id="266"/>
           </p14:sldIdLst>
         </p14:section>
-        <p14:section name="정리" id="{fe0606bf-2092-2fef-364e-21bfbec5aaf4}">
+        <p14:section name="정리" id="{a1c5267e-1f6b-7ed4-6c81-cdbc494d221c}">
           <p14:sldIdLst>
             <p14:sldId id="267"/>
           </p14:sldIdLst>
         </p14:section>
-        <p14:section name="보충" id="{0992ee3c-d411-7acb-c10f-e85d03394d84}">
+        <p14:section name="보충" id="{ec00143c-0300-12f1-bd49-f41d74f6a0f9}">
           <p14:sldIdLst>
             <p14:sldId id="268"/>
           </p14:sldIdLst>

--- a/dist/초3/사회·역사/과거와현재/초3_사회·역사_과거와현재_01_생활도구의변화_학생용.pptx
+++ b/dist/초3/사회·역사/과거와현재/초3_사회·역사_과거와현재_01_생활도구의변화_학생용.pptx
@@ -119,13 +119,13 @@
   <p:extLst>
     <p:ext uri="{521415D9-36F7-43E2-AB2F-B90AF26B5E84}">
       <p14:sectionLst xmlns:p14="http://schemas.microsoft.com/office/powerpoint/2010/main">
-        <p14:section name="도입" id="{ffcc0582-4af3-d376-c014-cce32c1c8844}">
+        <p14:section name="도입" id="{a9a5b14b-7a96-e595-758c-570c41768a94}">
           <p14:sldIdLst>
             <p14:sldId id="256"/>
             <p14:sldId id="257"/>
           </p14:sldIdLst>
         </p14:section>
-        <p14:section name="개념" id="{8114e7c7-cd56-cf77-7a4c-e320baada09a}">
+        <p14:section name="개념" id="{5f7b1a03-3f1b-eb80-f9f2-517cba6b88d4}">
           <p14:sldIdLst>
             <p14:sldId id="258"/>
             <p14:sldId id="259"/>
@@ -133,31 +133,31 @@
             <p14:sldId id="262"/>
           </p14:sldIdLst>
         </p14:section>
-        <p14:section name="연습" id="{9c9f58bf-31ba-1fee-c532-64c4cbdc3579}">
+        <p14:section name="연습" id="{147e00bb-f3c7-d205-1393-399a6eacb9cb}">
           <p14:sldIdLst>
             <p14:sldId id="261"/>
             <p14:sldId id="263"/>
             <p14:sldId id="264"/>
           </p14:sldIdLst>
         </p14:section>
-        <p14:section name="개념" id="{1a0b93dc-3419-3011-ba96-ed790129a62c}">
+        <p14:section name="개념" id="{bb7d0c5c-a185-4d72-fc0e-c0349c8f89b2}">
           <p14:sldIdLst/>
         </p14:section>
-        <p14:section name="연습" id="{dc4fa436-0bf2-8526-e869-0b802455978d}">
+        <p14:section name="연습" id="{8eaf28f9-9e76-47da-79fb-99910eed6aa9}">
           <p14:sldIdLst/>
         </p14:section>
-        <p14:section name="확인" id="{a681b449-49e3-6747-9d45-aab145d999b6}">
+        <p14:section name="확인" id="{d58d0cb2-3d24-7c12-0920-62c62e933c2f}">
           <p14:sldIdLst>
             <p14:sldId id="265"/>
             <p14:sldId id="266"/>
           </p14:sldIdLst>
         </p14:section>
-        <p14:section name="정리" id="{a1c5267e-1f6b-7ed4-6c81-cdbc494d221c}">
+        <p14:section name="정리" id="{dab5c7c9-10e3-3b97-6bfd-df8f3f410020}">
           <p14:sldIdLst>
             <p14:sldId id="267"/>
           </p14:sldIdLst>
         </p14:section>
-        <p14:section name="보충" id="{ec00143c-0300-12f1-bd49-f41d74f6a0f9}">
+        <p14:section name="보충" id="{dc9ed64d-47c7-5e53-e7b8-81691f20c2f4}">
           <p14:sldIdLst>
             <p14:sldId id="268"/>
           </p14:sldIdLst>
